--- a/assets/pptx/catalog-691.pptx
+++ b/assets/pptx/catalog-691.pptx
@@ -3385,7 +3385,7 @@
                 <a:ea typeface="Ebrima"/>
                 <a:cs typeface="Ebrima"/>
               </a:rPr>
-              <a:t>ወድሃልሁ ጌታ ያለልክ (2x)</a:t>
+              <a:t>ወድሃልሁ ጌታ ያለልክ 2x</a:t>
             </a:r>
           </a:p>
         </p:txBody>
@@ -3506,7 +3506,7 @@
                 <a:ea typeface="Ebrima"/>
                 <a:cs typeface="Ebrima"/>
               </a:rPr>
-              <a:t>እነሆ ስግደት ይገባሃል እኮ (2x)</a:t>
+              <a:t>እነሆ ስግደት ይገባሃል እኮ 2x</a:t>
             </a:r>
           </a:p>
         </p:txBody>
@@ -3645,7 +3645,7 @@
                 <a:ea typeface="Ebrima"/>
                 <a:cs typeface="Ebrima"/>
               </a:rPr>
-              <a:t>ይገርማል ፍቅርህ (2x)</a:t>
+              <a:t>ይገርማል ፍቅርህ 2x</a:t>
             </a:r>
           </a:p>
         </p:txBody>
@@ -3766,7 +3766,7 @@
                 <a:ea typeface="Ebrima"/>
                 <a:cs typeface="Ebrima"/>
               </a:rPr>
-              <a:t>ወድሃልሁ ጌታ ያለልክ (2x)</a:t>
+              <a:t>ወድሃልሁ ጌታ ያለልክ 2x</a:t>
             </a:r>
           </a:p>
         </p:txBody>
@@ -3905,7 +3905,7 @@
                 <a:ea typeface="Ebrima"/>
                 <a:cs typeface="Ebrima"/>
               </a:rPr>
-              <a:t>ይገርማል ፍቅርህ (3x)</a:t>
+              <a:t>ይገርማል ፍቅርህ 3x</a:t>
             </a:r>
           </a:p>
         </p:txBody>
